--- a/Day 7/Scope and Its types.pptx
+++ b/Day 7/Scope and Its types.pptx
@@ -24,7 +24,8 @@
     <p:sldId id="274" r:id="rId18"/>
     <p:sldId id="275" r:id="rId19"/>
     <p:sldId id="276" r:id="rId20"/>
-    <p:sldId id="277" r:id="rId21"/>
+    <p:sldId id="278" r:id="rId21"/>
+    <p:sldId id="277" r:id="rId22"/>
   </p:sldIdLst>
   <p:sldSz cx="12192000" cy="6858000"/>
   <p:notesSz cx="6858000" cy="9144000"/>
@@ -151,6 +152,7 @@
             <p14:sldId id="274"/>
             <p14:sldId id="275"/>
             <p14:sldId id="276"/>
+            <p14:sldId id="278"/>
             <p14:sldId id="277"/>
           </p14:sldIdLst>
         </p14:section>
@@ -964,7 +966,7 @@
           <a:p>
             <a:fld id="{A53C717B-BCF6-4ACF-9212-78DA937FFB87}" type="datetimeFigureOut">
               <a:rPr lang="en-US" smtClean="0"/>
-              <a:t>7/11/2026</a:t>
+              <a:t>7/13/2026</a:t>
             </a:fld>
             <a:endParaRPr lang="en-US"/>
           </a:p>
@@ -1215,7 +1217,7 @@
           <a:p>
             <a:fld id="{A53C717B-BCF6-4ACF-9212-78DA937FFB87}" type="datetimeFigureOut">
               <a:rPr lang="en-US" smtClean="0"/>
-              <a:t>7/11/2026</a:t>
+              <a:t>7/13/2026</a:t>
             </a:fld>
             <a:endParaRPr lang="en-US"/>
           </a:p>
@@ -1529,7 +1531,7 @@
           <a:p>
             <a:fld id="{A53C717B-BCF6-4ACF-9212-78DA937FFB87}" type="datetimeFigureOut">
               <a:rPr lang="en-US" smtClean="0"/>
-              <a:t>7/11/2026</a:t>
+              <a:t>7/13/2026</a:t>
             </a:fld>
             <a:endParaRPr lang="en-US"/>
           </a:p>
@@ -1862,7 +1864,7 @@
           <a:p>
             <a:fld id="{A53C717B-BCF6-4ACF-9212-78DA937FFB87}" type="datetimeFigureOut">
               <a:rPr lang="en-US" smtClean="0"/>
-              <a:t>7/11/2026</a:t>
+              <a:t>7/13/2026</a:t>
             </a:fld>
             <a:endParaRPr lang="en-US"/>
           </a:p>
@@ -2176,7 +2178,7 @@
           <a:p>
             <a:fld id="{A53C717B-BCF6-4ACF-9212-78DA937FFB87}" type="datetimeFigureOut">
               <a:rPr lang="en-US" smtClean="0"/>
-              <a:t>7/11/2026</a:t>
+              <a:t>7/13/2026</a:t>
             </a:fld>
             <a:endParaRPr lang="en-US"/>
           </a:p>
@@ -2569,7 +2571,7 @@
           <a:p>
             <a:fld id="{A53C717B-BCF6-4ACF-9212-78DA937FFB87}" type="datetimeFigureOut">
               <a:rPr lang="en-US" smtClean="0"/>
-              <a:t>7/11/2026</a:t>
+              <a:t>7/13/2026</a:t>
             </a:fld>
             <a:endParaRPr lang="en-US"/>
           </a:p>
@@ -2739,7 +2741,7 @@
           <a:p>
             <a:fld id="{A53C717B-BCF6-4ACF-9212-78DA937FFB87}" type="datetimeFigureOut">
               <a:rPr lang="en-US" smtClean="0"/>
-              <a:t>7/11/2026</a:t>
+              <a:t>7/13/2026</a:t>
             </a:fld>
             <a:endParaRPr lang="en-US"/>
           </a:p>
@@ -2919,7 +2921,7 @@
           <a:p>
             <a:fld id="{A53C717B-BCF6-4ACF-9212-78DA937FFB87}" type="datetimeFigureOut">
               <a:rPr lang="en-US" smtClean="0"/>
-              <a:t>7/11/2026</a:t>
+              <a:t>7/13/2026</a:t>
             </a:fld>
             <a:endParaRPr lang="en-US"/>
           </a:p>
@@ -3089,7 +3091,7 @@
           <a:p>
             <a:fld id="{A53C717B-BCF6-4ACF-9212-78DA937FFB87}" type="datetimeFigureOut">
               <a:rPr lang="en-US" smtClean="0"/>
-              <a:t>7/11/2026</a:t>
+              <a:t>7/13/2026</a:t>
             </a:fld>
             <a:endParaRPr lang="en-US"/>
           </a:p>
@@ -3336,7 +3338,7 @@
           <a:p>
             <a:fld id="{A53C717B-BCF6-4ACF-9212-78DA937FFB87}" type="datetimeFigureOut">
               <a:rPr lang="en-US" smtClean="0"/>
-              <a:t>7/11/2026</a:t>
+              <a:t>7/13/2026</a:t>
             </a:fld>
             <a:endParaRPr lang="en-US"/>
           </a:p>
@@ -3568,7 +3570,7 @@
           <a:p>
             <a:fld id="{A53C717B-BCF6-4ACF-9212-78DA937FFB87}" type="datetimeFigureOut">
               <a:rPr lang="en-US" smtClean="0"/>
-              <a:t>7/11/2026</a:t>
+              <a:t>7/13/2026</a:t>
             </a:fld>
             <a:endParaRPr lang="en-US"/>
           </a:p>
@@ -3942,7 +3944,7 @@
           <a:p>
             <a:fld id="{A53C717B-BCF6-4ACF-9212-78DA937FFB87}" type="datetimeFigureOut">
               <a:rPr lang="en-US" smtClean="0"/>
-              <a:t>7/11/2026</a:t>
+              <a:t>7/13/2026</a:t>
             </a:fld>
             <a:endParaRPr lang="en-US"/>
           </a:p>
@@ -4065,7 +4067,7 @@
           <a:p>
             <a:fld id="{A53C717B-BCF6-4ACF-9212-78DA937FFB87}" type="datetimeFigureOut">
               <a:rPr lang="en-US" smtClean="0"/>
-              <a:t>7/11/2026</a:t>
+              <a:t>7/13/2026</a:t>
             </a:fld>
             <a:endParaRPr lang="en-US"/>
           </a:p>
@@ -4160,7 +4162,7 @@
           <a:p>
             <a:fld id="{A53C717B-BCF6-4ACF-9212-78DA937FFB87}" type="datetimeFigureOut">
               <a:rPr lang="en-US" smtClean="0"/>
-              <a:t>7/11/2026</a:t>
+              <a:t>7/13/2026</a:t>
             </a:fld>
             <a:endParaRPr lang="en-US"/>
           </a:p>
@@ -4415,7 +4417,7 @@
           <a:p>
             <a:fld id="{A53C717B-BCF6-4ACF-9212-78DA937FFB87}" type="datetimeFigureOut">
               <a:rPr lang="en-US" smtClean="0"/>
-              <a:t>7/11/2026</a:t>
+              <a:t>7/13/2026</a:t>
             </a:fld>
             <a:endParaRPr lang="en-US"/>
           </a:p>
@@ -4720,7 +4722,7 @@
           <a:p>
             <a:fld id="{A53C717B-BCF6-4ACF-9212-78DA937FFB87}" type="datetimeFigureOut">
               <a:rPr lang="en-US" smtClean="0"/>
-              <a:t>7/11/2026</a:t>
+              <a:t>7/13/2026</a:t>
             </a:fld>
             <a:endParaRPr lang="en-US"/>
           </a:p>
@@ -5478,7 +5480,7 @@
           <a:p>
             <a:fld id="{A53C717B-BCF6-4ACF-9212-78DA937FFB87}" type="datetimeFigureOut">
               <a:rPr lang="en-US" smtClean="0"/>
-              <a:t>7/11/2026</a:t>
+              <a:t>7/13/2026</a:t>
             </a:fld>
             <a:endParaRPr lang="en-US"/>
           </a:p>
@@ -7004,23 +7006,15 @@
           <a:p>
             <a:r>
               <a:rPr lang="en-US" sz="1400" dirty="0"/>
-              <a:t>The variables </a:t>
-            </a:r>
-            <a:r>
-              <a:rPr lang="en-US" sz="1400" dirty="0" err="1"/>
-              <a:t>studentName</a:t>
+              <a:t>The variables studentName and marks are declared and initialized before the function using const. When we execute the code, both variables are printed successfully inside the </a:t>
+            </a:r>
+            <a:r>
+              <a:rPr lang="en-US" sz="1400" b="1" dirty="0"/>
+              <a:t>showStudent() </a:t>
             </a:r>
             <a:r>
               <a:rPr lang="en-US" sz="1400" dirty="0"/>
-              <a:t> and marks are declared and initialized before the function using const. When we execute the code, both variables are printed successfully inside the </a:t>
-            </a:r>
-            <a:r>
-              <a:rPr lang="en-US" sz="1400" dirty="0" err="1"/>
-              <a:t>showStudent</a:t>
-            </a:r>
-            <a:r>
-              <a:rPr lang="en-US" sz="1400" dirty="0"/>
-              <a:t>() function as well as outside the function. From this behavior, we identify that variables declared with const outside any function have global scope and can be accessed throughout the program. However, const variables cannot be reassigned after their declaration.</a:t>
+              <a:t>function as well as outside the function. From this behavior, we identify that variables declared with const outside any function have global scope and can be accessed throughout the program. However, const variables cannot be reassigned after their declaration.</a:t>
             </a:r>
           </a:p>
         </p:txBody>
@@ -7079,8 +7073,8 @@
         </p:blipFill>
         <p:spPr>
           <a:xfrm>
-            <a:off x="902110" y="4302032"/>
-            <a:ext cx="7083650" cy="1868925"/>
+            <a:off x="902110" y="4302033"/>
+            <a:ext cx="6135999" cy="1618900"/>
           </a:xfrm>
           <a:prstGeom prst="rect">
             <a:avLst/>
@@ -7194,23 +7188,23 @@
           <a:p>
             <a:r>
               <a:rPr lang="en-US" sz="1950" dirty="0"/>
-              <a:t>As shown in the code above, the variables </a:t>
-            </a:r>
-            <a:r>
-              <a:rPr lang="en-US" sz="1950" dirty="0" err="1"/>
-              <a:t>studentName</a:t>
+              <a:t>As shown in the code above, the variables studentName and marks are declared inside the </a:t>
+            </a:r>
+            <a:r>
+              <a:rPr lang="en-US" sz="1950" b="1" dirty="0"/>
+              <a:t>showStudent() </a:t>
             </a:r>
             <a:r>
               <a:rPr lang="en-US" sz="1950" dirty="0"/>
-              <a:t> and marks are declared inside the </a:t>
-            </a:r>
-            <a:r>
-              <a:rPr lang="en-US" sz="1950" dirty="0" err="1"/>
-              <a:t>showStudent</a:t>
+              <a:t>function using const. When we execute the code, both variables are printed successfully inside the function because they are accessed within the same function where they are declared. However, when we try to print them outside the function, JavaScript gives a </a:t>
+            </a:r>
+            <a:r>
+              <a:rPr lang="en-US" sz="1950" b="1" dirty="0"/>
+              <a:t>ReferenceError.</a:t>
             </a:r>
             <a:r>
               <a:rPr lang="en-US" sz="1950" dirty="0"/>
-              <a:t>() function using const. When we execute the code, both variables are printed successfully inside the function because they are accessed within the same function where they are declared. However, when we try to print them outside the function, JavaScript gives a ReferenceError. </a:t>
+              <a:t> </a:t>
             </a:r>
           </a:p>
         </p:txBody>
@@ -7297,14 +7291,15 @@
         </p:nvPicPr>
         <p:blipFill>
           <a:blip r:embed="rId2"/>
+          <a:srcRect l="913" t="4251"/>
           <a:stretch>
             <a:fillRect/>
           </a:stretch>
         </p:blipFill>
         <p:spPr>
           <a:xfrm>
-            <a:off x="1074420" y="3157213"/>
-            <a:ext cx="7764780" cy="2211230"/>
+            <a:off x="1154545" y="3205017"/>
+            <a:ext cx="7693891" cy="2117243"/>
           </a:xfrm>
           <a:prstGeom prst="rect">
             <a:avLst/>
@@ -7325,8 +7320,8 @@
         </p:nvSpPr>
         <p:spPr>
           <a:xfrm>
-            <a:off x="1074420" y="785686"/>
-            <a:ext cx="8130540" cy="1592744"/>
+            <a:off x="1074420" y="1053540"/>
+            <a:ext cx="8130540" cy="1892826"/>
           </a:xfrm>
           <a:prstGeom prst="rect">
             <a:avLst/>
@@ -7341,10 +7336,10 @@
           <a:p>
             <a:r>
               <a:rPr lang="en-US" sz="1950" dirty="0"/>
-              <a:t>From this behavior, we identify that const follows function scope when declared inside a function, meaning these variables can only be accessed within that function. Additionally, JavaScript executes code line by line, so when it encounters the error at </a:t>
-            </a:r>
-            <a:r>
-              <a:rPr lang="en-US" sz="1950" dirty="0" err="1"/>
+              <a:t>From this behavior, we identify that const follows function scope when declared inside a function, meaning these variables can only be accessed within that function. As we know that JavaScript executes code line by line, so when it encounters the error at </a:t>
+            </a:r>
+            <a:r>
+              <a:rPr lang="en-US" sz="1950" b="1" dirty="0"/>
               <a:t>studentName</a:t>
             </a:r>
             <a:r>
@@ -7446,8 +7441,8 @@
         </p:nvSpPr>
         <p:spPr>
           <a:xfrm>
-            <a:off x="5514049" y="1459547"/>
-            <a:ext cx="3828071" cy="3093154"/>
+            <a:off x="5498564" y="1882423"/>
+            <a:ext cx="3571545" cy="3093154"/>
           </a:xfrm>
           <a:prstGeom prst="rect">
             <a:avLst/>
@@ -7788,6 +7783,140 @@
   <p:cSld>
     <p:spTree>
       <p:nvGrpSpPr>
+        <p:cNvPr id="1" name="">
+          <a:extLst>
+            <a:ext uri="{FF2B5EF4-FFF2-40B4-BE49-F238E27FC236}">
+              <a16:creationId xmlns:a16="http://schemas.microsoft.com/office/drawing/2014/main" id="{9F1BA468-0AD9-5A20-D90B-0CE375495359}"/>
+            </a:ext>
+          </a:extLst>
+        </p:cNvPr>
+        <p:cNvGrpSpPr/>
+        <p:nvPr/>
+      </p:nvGrpSpPr>
+      <p:grpSpPr>
+        <a:xfrm>
+          <a:off x="0" y="0"/>
+          <a:ext cx="0" cy="0"/>
+          <a:chOff x="0" y="0"/>
+          <a:chExt cx="0" cy="0"/>
+        </a:xfrm>
+      </p:grpSpPr>
+      <p:sp>
+        <p:nvSpPr>
+          <p:cNvPr id="6" name="TextBox 5">
+            <a:extLst>
+              <a:ext uri="{FF2B5EF4-FFF2-40B4-BE49-F238E27FC236}">
+                <a16:creationId xmlns:a16="http://schemas.microsoft.com/office/drawing/2014/main" id="{E4BE55E6-74CA-FCC8-9C4C-F17B95BD5B5D}"/>
+              </a:ext>
+            </a:extLst>
+          </p:cNvPr>
+          <p:cNvSpPr txBox="1"/>
+          <p:nvPr/>
+        </p:nvSpPr>
+        <p:spPr>
+          <a:xfrm>
+            <a:off x="1226243" y="1555025"/>
+            <a:ext cx="7997190" cy="2954655"/>
+          </a:xfrm>
+          <a:prstGeom prst="rect">
+            <a:avLst/>
+          </a:prstGeom>
+          <a:noFill/>
+        </p:spPr>
+        <p:txBody>
+          <a:bodyPr wrap="square">
+            <a:spAutoFit/>
+          </a:bodyPr>
+          <a:lstStyle/>
+          <a:p>
+            <a:pPr algn="ctr"/>
+            <a:r>
+              <a:rPr lang="en-US" sz="1950" b="1" dirty="0">
+                <a:solidFill>
+                  <a:schemeClr val="accent2"/>
+                </a:solidFill>
+              </a:rPr>
+              <a:t>Why do we need scope?</a:t>
+            </a:r>
+          </a:p>
+          <a:p>
+            <a:r>
+              <a:rPr lang="en-US" dirty="0"/>
+              <a:t>Scope tells us where a variable can be used in our code. It controls the access of variables and helps JavaScript understand where they are available.</a:t>
+            </a:r>
+            <a:endParaRPr lang="en-US" dirty="0">
+              <a:solidFill>
+                <a:schemeClr val="accent2"/>
+              </a:solidFill>
+            </a:endParaRPr>
+          </a:p>
+          <a:p>
+            <a:endParaRPr lang="en-US" sz="1950" dirty="0"/>
+          </a:p>
+          <a:p>
+            <a:endParaRPr lang="en-US" sz="1950" dirty="0"/>
+          </a:p>
+          <a:p>
+            <a:pPr algn="ctr"/>
+            <a:r>
+              <a:rPr lang="en-US" sz="1950" b="1" dirty="0">
+                <a:solidFill>
+                  <a:schemeClr val="accent2"/>
+                </a:solidFill>
+              </a:rPr>
+              <a:t>Benefits?</a:t>
+            </a:r>
+          </a:p>
+          <a:p>
+            <a:pPr marL="285750" indent="-285750">
+              <a:buFont typeface="Arial" panose="020B0604020202020204" pitchFamily="34" charset="0"/>
+              <a:buChar char="•"/>
+            </a:pPr>
+            <a:r>
+              <a:rPr lang="en-US" dirty="0"/>
+              <a:t>It controls where variables can be accessed. </a:t>
+            </a:r>
+          </a:p>
+          <a:p>
+            <a:pPr marL="285750" indent="-285750">
+              <a:buFont typeface="Arial" panose="020B0604020202020204" pitchFamily="34" charset="0"/>
+              <a:buChar char="•"/>
+            </a:pPr>
+            <a:r>
+              <a:rPr lang="en-US" dirty="0"/>
+              <a:t>It prevents conflicts between variables with the same name. </a:t>
+            </a:r>
+          </a:p>
+          <a:p>
+            <a:pPr marL="285750" indent="-285750">
+              <a:buFont typeface="Arial" panose="020B0604020202020204" pitchFamily="34" charset="0"/>
+              <a:buChar char="•"/>
+            </a:pPr>
+            <a:r>
+              <a:rPr lang="en-US" dirty="0"/>
+              <a:t>It keeps the code organized and easy to understand. </a:t>
+            </a:r>
+          </a:p>
+        </p:txBody>
+      </p:sp>
+    </p:spTree>
+    <p:extLst>
+      <p:ext uri="{BB962C8B-B14F-4D97-AF65-F5344CB8AC3E}">
+        <p14:creationId xmlns:p14="http://schemas.microsoft.com/office/powerpoint/2010/main" val="3185216182"/>
+      </p:ext>
+    </p:extLst>
+  </p:cSld>
+  <p:clrMapOvr>
+    <a:masterClrMapping/>
+  </p:clrMapOvr>
+</p:sld>
+</file>
+
+<file path=ppt/slides/slide21.xml><?xml version="1.0" encoding="utf-8"?>
+<p:sld xmlns:a="http://schemas.openxmlformats.org/drawingml/2006/main" xmlns:r="http://schemas.openxmlformats.org/officeDocument/2006/relationships" xmlns:p="http://schemas.openxmlformats.org/presentationml/2006/main">
+  <p:cSld>
+    <p:spTree>
+      <p:nvGrpSpPr>
         <p:cNvPr id="1" name=""/>
         <p:cNvGrpSpPr/>
         <p:nvPr/>
@@ -7814,7 +7943,7 @@
         </p:nvSpPr>
         <p:spPr>
           <a:xfrm>
-            <a:off x="4329682" y="2632055"/>
+            <a:off x="3636955" y="2826019"/>
             <a:ext cx="3532635" cy="923330"/>
           </a:xfrm>
           <a:prstGeom prst="rect">
@@ -8230,7 +8359,7 @@
         <p:spPr>
           <a:xfrm>
             <a:off x="737419" y="521109"/>
-            <a:ext cx="8681885" cy="5386090"/>
+            <a:ext cx="8681885" cy="5493812"/>
           </a:xfrm>
           <a:prstGeom prst="rect">
             <a:avLst/>
@@ -8257,7 +8386,15 @@
           <a:p>
             <a:r>
               <a:rPr lang="en-US" sz="1950" dirty="0"/>
-              <a:t>let was introduced in ES6 in 2015 is used to declare a variable whose value can be changed later, but it cannot be declared again in the same scope.</a:t>
+              <a:t>let was introduced in ES6 (the 6</a:t>
+            </a:r>
+            <a:r>
+              <a:rPr lang="en-US" sz="1950" baseline="30000" dirty="0"/>
+              <a:t>th</a:t>
+            </a:r>
+            <a:r>
+              <a:rPr lang="en-US" sz="1950" dirty="0"/>
+              <a:t> version of JS) in 2015 is used to declare a variable whose value can be changed later, but it cannot be declared again in the same scope.</a:t>
             </a:r>
           </a:p>
           <a:p>
@@ -8874,31 +9011,7 @@
             <a:pPr algn="just"/>
             <a:r>
               <a:rPr lang="en-US" sz="1950" dirty="0"/>
-              <a:t>As shown in the code above, the variables </a:t>
-            </a:r>
-            <a:r>
-              <a:rPr lang="en-US" sz="1950" dirty="0" err="1"/>
-              <a:t>studentName</a:t>
-            </a:r>
-            <a:r>
-              <a:rPr lang="en-US" sz="1950" dirty="0"/>
-              <a:t> and marks are declared inside the </a:t>
-            </a:r>
-            <a:r>
-              <a:rPr lang="en-US" sz="1950" dirty="0" err="1"/>
-              <a:t>showStudent</a:t>
-            </a:r>
-            <a:r>
-              <a:rPr lang="en-US" sz="1950" dirty="0"/>
-              <a:t>() function using var. When the function is called, both variables are printed successfully because they are being accessed within the same function. However, when we try to print </a:t>
-            </a:r>
-            <a:r>
-              <a:rPr lang="en-US" sz="1950" dirty="0" err="1"/>
-              <a:t>studentName</a:t>
-            </a:r>
-            <a:r>
-              <a:rPr lang="en-US" sz="1950" dirty="0"/>
-              <a:t> and marks outside the function, JavaScript throws a ReferenceError. </a:t>
+              <a:t>As shown in the code above, the variables studentName and marks are declared inside the showStudent() function using var. When the function is called, both variables are printed successfully because they are being accessed within the same function. However, when we try to print studentName and marks outside the function, JavaScript throws a ReferenceError. </a:t>
             </a:r>
           </a:p>
         </p:txBody>
@@ -9007,15 +9120,7 @@
             </a:r>
             <a:r>
               <a:rPr lang="en-US" sz="1950" dirty="0"/>
-              <a:t>, meaning variables declared inside a function can only be accessed within that function. Additionally, JavaScript executes the code line by line, so when it encounters the error at </a:t>
-            </a:r>
-            <a:r>
-              <a:rPr lang="en-US" sz="1950" dirty="0" err="1"/>
-              <a:t>studentName</a:t>
-            </a:r>
-            <a:r>
-              <a:rPr lang="en-US" sz="1950" dirty="0"/>
-              <a:t>, the program stops immediately and the marks statement is not execute</a:t>
+              <a:t>, meaning variables declared inside a function can only be accessed within that function. Additionally, JavaScript executes the code line by line, so when it encounters the error at studentName, the program stops immediately and the marks statement is not execute</a:t>
             </a:r>
           </a:p>
         </p:txBody>
